--- a/vector-music-02-academic-light.pptx
+++ b/vector-music-02-academic-light.pptx
@@ -3588,30 +3588,6 @@
           </a:p>
         </p:txBody>
       </p:sp>
-      <p:pic>
-        <p:nvPicPr>
-          <p:cNvPr id="16" name="Picture 15" descr="vector_ray_t.png"/>
-          <p:cNvPicPr>
-            <a:picLocks noChangeAspect="1"/>
-          </p:cNvPicPr>
-          <p:nvPr/>
-        </p:nvPicPr>
-        <p:blipFill>
-          <a:blip r:embed="rId3"/>
-          <a:stretch>
-            <a:fillRect/>
-          </a:stretch>
-        </p:blipFill>
-        <p:spPr>
-          <a:xfrm>
-            <a:off x="11155680" y="274320"/>
-            <a:ext cx="822960" cy="582402"/>
-          </a:xfrm>
-          <a:prstGeom prst="rect">
-            <a:avLst/>
-          </a:prstGeom>
-        </p:spPr>
-      </p:pic>
     </p:spTree>
   </p:cSld>
   <p:clrMapOvr>
@@ -5413,7 +5389,7 @@
                 </a:solidFill>
                 <a:latin typeface="JetBrains Mono"/>
               </a:rPr>
-              <a:t>4 / 12</a:t>
+              <a:t>4 / 4</a:t>
             </a:r>
           </a:p>
         </p:txBody>
@@ -5426,8 +5402,8 @@
         </p:nvSpPr>
         <p:spPr>
           <a:xfrm>
-            <a:off x="8778240" y="6528816"/>
-            <a:ext cx="2834640" cy="228600"/>
+            <a:off x="7498079" y="6528816"/>
+            <a:ext cx="4114800" cy="228600"/>
           </a:xfrm>
           <a:prstGeom prst="rect">
             <a:avLst/>
@@ -5448,7 +5424,7 @@
                 </a:solidFill>
                 <a:latin typeface="JetBrains Mono"/>
               </a:rPr>
-              <a:t>Vector Legal · Hermes Agent · Osmosy</a:t>
+              <a:t>Vector Music · Hermes Agent · Osmosy</a:t>
             </a:r>
           </a:p>
         </p:txBody>

--- a/vector-music-02-academic-light.pptx
+++ b/vector-music-02-academic-light.pptx
@@ -3588,6 +3588,30 @@
           </a:p>
         </p:txBody>
       </p:sp>
+      <p:pic>
+        <p:nvPicPr>
+          <p:cNvPr id="16" name="Picture 15" descr="vector_ray_t.png"/>
+          <p:cNvPicPr>
+            <a:picLocks noChangeAspect="1"/>
+          </p:cNvPicPr>
+          <p:nvPr/>
+        </p:nvPicPr>
+        <p:blipFill>
+          <a:blip r:embed="rId3"/>
+          <a:stretch>
+            <a:fillRect/>
+          </a:stretch>
+        </p:blipFill>
+        <p:spPr>
+          <a:xfrm>
+            <a:off x="11155680" y="274320"/>
+            <a:ext cx="822960" cy="582402"/>
+          </a:xfrm>
+          <a:prstGeom prst="rect">
+            <a:avLst/>
+          </a:prstGeom>
+        </p:spPr>
+      </p:pic>
     </p:spTree>
   </p:cSld>
   <p:clrMapOvr>
